--- a/cursos/recursos/el-mapa-de-los-finales/19-cortes-vertical-y-horizontal.pptx
+++ b/cursos/recursos/el-mapa-de-los-finales/19-cortes-vertical-y-horizontal.pptx
@@ -5668,7 +5668,7 @@
                 </a:solidFill>
                 <a:latin typeface="Calibri"/>
               </a:rPr>
-              <a:t>Con la torre y el rey cortados, probá el corte en una, dos y tres columnas contra el motor.</a:t>
+              <a:t>Con la torre y el rey cortados, prueba el corte en una, dos y tres columnas contra el motor.</a:t>
             </a:r>
           </a:p>
           <a:p>
@@ -5739,7 +5739,7 @@
                 </a:solidFill>
                 <a:latin typeface="Calibri"/>
               </a:rPr>
-              <a:t>•  Recorré cada línea principal hasta entender el porqué de cada jugada.</a:t>
+              <a:t>•  Recorre cada línea principal hasta entender el porqué de cada jugada.</a:t>
             </a:r>
           </a:p>
           <a:p>
@@ -5755,7 +5755,7 @@
                 </a:solidFill>
                 <a:latin typeface="Calibri"/>
               </a:rPr>
-              <a:t>•  Practicá primero las posiciones clave, después las demás.</a:t>
+              <a:t>•  Practica primero las posiciones clave, después las demás.</a:t>
             </a:r>
           </a:p>
           <a:p>
@@ -5771,7 +5771,7 @@
                 </a:solidFill>
                 <a:latin typeface="Calibri"/>
               </a:rPr>
-              <a:t>•  Anotá las reglas de cada final con tus palabras.</a:t>
+              <a:t>•  Anota las reglas de cada final con tus palabras.</a:t>
             </a:r>
           </a:p>
         </p:txBody>
